--- a/youtube-slides/若年ミオクロニーてんかん/thumbnail_slide.pptx
+++ b/youtube-slides/若年ミオクロニーてんかん/thumbnail_slide.pptx
@@ -964,9 +964,9 @@
                 <a:solidFill>
                   <a:srgbClr val="FFFFFF"/>
                 </a:solidFill>
-                <a:latin typeface="Arial Black" pitchFamily="34" charset="0"/>
-                <a:ea typeface="Arial Black" pitchFamily="34" charset="-122"/>
-                <a:cs typeface="Arial Black" pitchFamily="34" charset="-120"/>
+                <a:latin typeface="BIZ UDPGothic" pitchFamily="34" charset="0"/>
+                <a:ea typeface="BIZ UDPGothic" pitchFamily="34" charset="-122"/>
+                <a:cs typeface="BIZ UDPGothic" pitchFamily="34" charset="-120"/>
               </a:rPr>
               <a:t>見逃していませんか？</a:t>
             </a:r>
@@ -999,17 +999,17 @@
               <a:buNone/>
             </a:pPr>
             <a:r>
-              <a:rPr lang="en-US" sz="5600" b="1" dirty="0">
+              <a:rPr lang="en-US" sz="4800" b="1" dirty="0">
                 <a:solidFill>
                   <a:srgbClr val="FFFFFF"/>
                 </a:solidFill>
-                <a:latin typeface="Arial Black" pitchFamily="34" charset="0"/>
-                <a:ea typeface="Arial Black" pitchFamily="34" charset="-122"/>
-                <a:cs typeface="Arial Black" pitchFamily="34" charset="-120"/>
+                <a:latin typeface="BIZ UDPGothic" pitchFamily="34" charset="0"/>
+                <a:ea typeface="BIZ UDPGothic" pitchFamily="34" charset="-122"/>
+                <a:cs typeface="BIZ UDPGothic" pitchFamily="34" charset="-120"/>
               </a:rPr>
               <a:t>若年ミオクロニー</a:t>
             </a:r>
-            <a:endParaRPr lang="en-US" sz="5600" dirty="0"/>
+            <a:endParaRPr lang="en-US" sz="4800" dirty="0"/>
           </a:p>
         </p:txBody>
       </p:sp>
@@ -1038,17 +1038,17 @@
               <a:buNone/>
             </a:pPr>
             <a:r>
-              <a:rPr lang="en-US" sz="5600" b="1" dirty="0">
+              <a:rPr lang="en-US" sz="4800" b="1" dirty="0">
                 <a:solidFill>
                   <a:srgbClr val="4A90D9"/>
                 </a:solidFill>
-                <a:latin typeface="Arial Black" pitchFamily="34" charset="0"/>
-                <a:ea typeface="Arial Black" pitchFamily="34" charset="-122"/>
-                <a:cs typeface="Arial Black" pitchFamily="34" charset="-120"/>
+                <a:latin typeface="BIZ UDPGothic" pitchFamily="34" charset="0"/>
+                <a:ea typeface="BIZ UDPGothic" pitchFamily="34" charset="-122"/>
+                <a:cs typeface="BIZ UDPGothic" pitchFamily="34" charset="-120"/>
               </a:rPr>
               <a:t>てんかん</a:t>
             </a:r>
-            <a:endParaRPr lang="en-US" sz="5600" dirty="0"/>
+            <a:endParaRPr lang="en-US" sz="4800" dirty="0"/>
           </a:p>
         </p:txBody>
       </p:sp>
@@ -1124,9 +1124,9 @@
                 <a:solidFill>
                   <a:srgbClr val="1B3A5C"/>
                 </a:solidFill>
-                <a:latin typeface="Arial Black" pitchFamily="34" charset="0"/>
-                <a:ea typeface="Arial Black" pitchFamily="34" charset="-122"/>
-                <a:cs typeface="Arial Black" pitchFamily="34" charset="-120"/>
+                <a:latin typeface="BIZ UDPGothic" pitchFamily="34" charset="0"/>
+                <a:ea typeface="BIZ UDPGothic" pitchFamily="34" charset="-122"/>
+                <a:cs typeface="BIZ UDPGothic" pitchFamily="34" charset="-120"/>
               </a:rPr>
               <a:t>朝のピクつきを問診！</a:t>
             </a:r>
@@ -1183,9 +1183,9 @@
                 <a:solidFill>
                   <a:srgbClr val="1B3A5C"/>
                 </a:solidFill>
-                <a:latin typeface="Arial Black" pitchFamily="34" charset="0"/>
-                <a:ea typeface="Arial Black" pitchFamily="34" charset="-122"/>
-                <a:cs typeface="Arial Black" pitchFamily="34" charset="-120"/>
+                <a:latin typeface="BIZ UDPGothic" pitchFamily="34" charset="0"/>
+                <a:ea typeface="BIZ UDPGothic" pitchFamily="34" charset="-122"/>
+                <a:cs typeface="BIZ UDPGothic" pitchFamily="34" charset="-120"/>
               </a:rPr>
               <a:t>VPA vs LEV 最新メタ解析</a:t>
             </a:r>
@@ -1242,9 +1242,9 @@
                 <a:solidFill>
                   <a:srgbClr val="1B3A5C"/>
                 </a:solidFill>
-                <a:latin typeface="Arial Black" pitchFamily="34" charset="0"/>
-                <a:ea typeface="Arial Black" pitchFamily="34" charset="-122"/>
-                <a:cs typeface="Arial Black" pitchFamily="34" charset="-120"/>
+                <a:latin typeface="BIZ UDPGothic" pitchFamily="34" charset="0"/>
+                <a:ea typeface="BIZ UDPGothic" pitchFamily="34" charset="-122"/>
+                <a:cs typeface="BIZ UDPGothic" pitchFamily="34" charset="-120"/>
               </a:rPr>
               <a:t>CBZ禁忌のワケ</a:t>
             </a:r>
@@ -1281,9 +1281,9 @@
                 <a:solidFill>
                   <a:srgbClr val="4A90D9"/>
                 </a:solidFill>
-                <a:latin typeface="Arial" pitchFamily="34" charset="0"/>
-                <a:ea typeface="Arial" pitchFamily="34" charset="-122"/>
-                <a:cs typeface="Arial" pitchFamily="34" charset="-120"/>
+                <a:latin typeface="BIZ UDPGothic" pitchFamily="34" charset="0"/>
+                <a:ea typeface="BIZ UDPGothic" pitchFamily="34" charset="-122"/>
+                <a:cs typeface="BIZ UDPGothic" pitchFamily="34" charset="-120"/>
               </a:rPr>
               <a:t>医知創造ラボ</a:t>
             </a:r>
